--- a/Hymn of Heaven.pptx
+++ b/Hymn of Heaven.pptx
@@ -259,7 +259,7 @@
           <a:p>
             <a:fld id="{E759A0DE-F190-5444-87AC-4719D5F20D15}" type="datetimeFigureOut">
               <a:rPr lang="en-US" smtClean="0"/>
-              <a:t>8/1/26</a:t>
+              <a:t>10/28/26</a:t>
             </a:fld>
             <a:endParaRPr lang="en-US"/>
           </a:p>
@@ -429,7 +429,7 @@
           <a:p>
             <a:fld id="{E759A0DE-F190-5444-87AC-4719D5F20D15}" type="datetimeFigureOut">
               <a:rPr lang="en-US" smtClean="0"/>
-              <a:t>8/1/26</a:t>
+              <a:t>10/28/26</a:t>
             </a:fld>
             <a:endParaRPr lang="en-US"/>
           </a:p>
@@ -609,7 +609,7 @@
           <a:p>
             <a:fld id="{E759A0DE-F190-5444-87AC-4719D5F20D15}" type="datetimeFigureOut">
               <a:rPr lang="en-US" smtClean="0"/>
-              <a:t>8/1/26</a:t>
+              <a:t>10/28/26</a:t>
             </a:fld>
             <a:endParaRPr lang="en-US"/>
           </a:p>
@@ -779,7 +779,7 @@
           <a:p>
             <a:fld id="{E759A0DE-F190-5444-87AC-4719D5F20D15}" type="datetimeFigureOut">
               <a:rPr lang="en-US" smtClean="0"/>
-              <a:t>8/1/26</a:t>
+              <a:t>10/28/26</a:t>
             </a:fld>
             <a:endParaRPr lang="en-US"/>
           </a:p>
@@ -1025,7 +1025,7 @@
           <a:p>
             <a:fld id="{E759A0DE-F190-5444-87AC-4719D5F20D15}" type="datetimeFigureOut">
               <a:rPr lang="en-US" smtClean="0"/>
-              <a:t>8/1/26</a:t>
+              <a:t>10/28/26</a:t>
             </a:fld>
             <a:endParaRPr lang="en-US"/>
           </a:p>
@@ -1257,7 +1257,7 @@
           <a:p>
             <a:fld id="{E759A0DE-F190-5444-87AC-4719D5F20D15}" type="datetimeFigureOut">
               <a:rPr lang="en-US" smtClean="0"/>
-              <a:t>8/1/26</a:t>
+              <a:t>10/28/26</a:t>
             </a:fld>
             <a:endParaRPr lang="en-US"/>
           </a:p>
@@ -1624,7 +1624,7 @@
           <a:p>
             <a:fld id="{E759A0DE-F190-5444-87AC-4719D5F20D15}" type="datetimeFigureOut">
               <a:rPr lang="en-US" smtClean="0"/>
-              <a:t>8/1/26</a:t>
+              <a:t>10/28/26</a:t>
             </a:fld>
             <a:endParaRPr lang="en-US"/>
           </a:p>
@@ -1742,7 +1742,7 @@
           <a:p>
             <a:fld id="{E759A0DE-F190-5444-87AC-4719D5F20D15}" type="datetimeFigureOut">
               <a:rPr lang="en-US" smtClean="0"/>
-              <a:t>8/1/26</a:t>
+              <a:t>10/28/26</a:t>
             </a:fld>
             <a:endParaRPr lang="en-US"/>
           </a:p>
@@ -1837,7 +1837,7 @@
           <a:p>
             <a:fld id="{E759A0DE-F190-5444-87AC-4719D5F20D15}" type="datetimeFigureOut">
               <a:rPr lang="en-US" smtClean="0"/>
-              <a:t>8/1/26</a:t>
+              <a:t>10/28/26</a:t>
             </a:fld>
             <a:endParaRPr lang="en-US"/>
           </a:p>
@@ -2114,7 +2114,7 @@
           <a:p>
             <a:fld id="{E759A0DE-F190-5444-87AC-4719D5F20D15}" type="datetimeFigureOut">
               <a:rPr lang="en-US" smtClean="0"/>
-              <a:t>8/1/26</a:t>
+              <a:t>10/28/26</a:t>
             </a:fld>
             <a:endParaRPr lang="en-US"/>
           </a:p>
@@ -2371,7 +2371,7 @@
           <a:p>
             <a:fld id="{E759A0DE-F190-5444-87AC-4719D5F20D15}" type="datetimeFigureOut">
               <a:rPr lang="en-US" smtClean="0"/>
-              <a:t>8/1/26</a:t>
+              <a:t>10/28/26</a:t>
             </a:fld>
             <a:endParaRPr lang="en-US"/>
           </a:p>
@@ -2584,7 +2584,7 @@
           <a:p>
             <a:fld id="{E759A0DE-F190-5444-87AC-4719D5F20D15}" type="datetimeFigureOut">
               <a:rPr lang="en-US" smtClean="0"/>
-              <a:t>8/1/26</a:t>
+              <a:t>10/28/26</a:t>
             </a:fld>
             <a:endParaRPr lang="en-US"/>
           </a:p>
@@ -3754,6 +3754,30 @@
             </a:endParaRPr>
           </a:p>
           <a:p>
+            <a:r>
+              <a:rPr lang="en-US" sz="4800" dirty="0">
+                <a:solidFill>
+                  <a:schemeClr val="bg1"/>
+                </a:solidFill>
+                <a:latin typeface="Avenir Medium" panose="02000503020000020003" pitchFamily="2" charset="0"/>
+                <a:ea typeface="Bodoni Ornaments" pitchFamily="2" charset="0"/>
+              </a:rPr>
+              <a:t>There will be a day</a:t>
+            </a:r>
+          </a:p>
+          <a:p>
+            <a:r>
+              <a:rPr lang="en-US" sz="4800" dirty="0">
+                <a:solidFill>
+                  <a:schemeClr val="bg1"/>
+                </a:solidFill>
+                <a:latin typeface="Avenir Medium" panose="02000503020000020003" pitchFamily="2" charset="0"/>
+                <a:ea typeface="Bodoni Ornaments" pitchFamily="2" charset="0"/>
+              </a:rPr>
+              <a:t>When all will bow before Him</a:t>
+            </a:r>
+          </a:p>
+          <a:p>
             <a:endParaRPr lang="en-US" sz="4800" dirty="0">
               <a:solidFill>
                 <a:schemeClr val="bg1"/>
@@ -3761,30 +3785,6 @@
               <a:latin typeface="Avenir Medium" panose="02000503020000020003" pitchFamily="2" charset="0"/>
               <a:ea typeface="Bodoni Ornaments" pitchFamily="2" charset="0"/>
             </a:endParaRPr>
-          </a:p>
-          <a:p>
-            <a:r>
-              <a:rPr lang="en-US" sz="4800" dirty="0">
-                <a:solidFill>
-                  <a:schemeClr val="bg1"/>
-                </a:solidFill>
-                <a:latin typeface="Avenir Medium" panose="02000503020000020003" pitchFamily="2" charset="0"/>
-                <a:ea typeface="Bodoni Ornaments" pitchFamily="2" charset="0"/>
-              </a:rPr>
-              <a:t>There will be a day</a:t>
-            </a:r>
-          </a:p>
-          <a:p>
-            <a:r>
-              <a:rPr lang="en-US" sz="4800" dirty="0">
-                <a:solidFill>
-                  <a:schemeClr val="bg1"/>
-                </a:solidFill>
-                <a:latin typeface="Avenir Medium" panose="02000503020000020003" pitchFamily="2" charset="0"/>
-                <a:ea typeface="Bodoni Ornaments" pitchFamily="2" charset="0"/>
-              </a:rPr>
-              <a:t>When all will bow before Him</a:t>
-            </a:r>
           </a:p>
           <a:p>
             <a:r>
@@ -3893,7 +3893,31 @@
             </a:endParaRPr>
           </a:p>
           <a:p>
-            <a:endParaRPr lang="en-US" sz="4800" dirty="0">
+            <a:r>
+              <a:rPr lang="en-US" sz="4800" dirty="0">
+                <a:solidFill>
+                  <a:schemeClr val="bg1"/>
+                </a:solidFill>
+                <a:latin typeface="Avenir Medium" panose="02000503020000020003" pitchFamily="2" charset="0"/>
+                <a:ea typeface="Bodoni Ornaments" pitchFamily="2" charset="0"/>
+              </a:rPr>
+              <a:t>Standing face to face</a:t>
+            </a:r>
+          </a:p>
+          <a:p>
+            <a:r>
+              <a:rPr lang="en-US" sz="4800" dirty="0">
+                <a:solidFill>
+                  <a:schemeClr val="bg1"/>
+                </a:solidFill>
+                <a:latin typeface="Avenir Medium" panose="02000503020000020003" pitchFamily="2" charset="0"/>
+                <a:ea typeface="Bodoni Ornaments" pitchFamily="2" charset="0"/>
+              </a:rPr>
+              <a:t>With He who died </a:t>
+            </a:r>
+          </a:p>
+          <a:p>
+            <a:endParaRPr lang="en-US" sz="4800">
               <a:solidFill>
                 <a:schemeClr val="bg1"/>
               </a:solidFill>
@@ -3903,38 +3927,24 @@
           </a:p>
           <a:p>
             <a:r>
-              <a:rPr lang="en-US" sz="4800" dirty="0">
-                <a:solidFill>
-                  <a:schemeClr val="bg1"/>
-                </a:solidFill>
-                <a:latin typeface="Avenir Medium" panose="02000503020000020003" pitchFamily="2" charset="0"/>
-                <a:ea typeface="Bodoni Ornaments" pitchFamily="2" charset="0"/>
-              </a:rPr>
-              <a:t>Standing face to face</a:t>
-            </a:r>
-          </a:p>
-          <a:p>
-            <a:r>
-              <a:rPr lang="en-US" sz="4800" dirty="0">
-                <a:solidFill>
-                  <a:schemeClr val="bg1"/>
-                </a:solidFill>
-                <a:latin typeface="Avenir Medium" panose="02000503020000020003" pitchFamily="2" charset="0"/>
-                <a:ea typeface="Bodoni Ornaments" pitchFamily="2" charset="0"/>
-              </a:rPr>
-              <a:t>With He who died </a:t>
-            </a:r>
-          </a:p>
-          <a:p>
-            <a:r>
-              <a:rPr lang="en-US" sz="4800" dirty="0">
-                <a:solidFill>
-                  <a:schemeClr val="bg1"/>
-                </a:solidFill>
-                <a:latin typeface="Avenir Medium" panose="02000503020000020003" pitchFamily="2" charset="0"/>
-                <a:ea typeface="Bodoni Ornaments" pitchFamily="2" charset="0"/>
-              </a:rPr>
-              <a:t>and rose again</a:t>
+              <a:rPr lang="en-US" sz="4800">
+                <a:solidFill>
+                  <a:schemeClr val="bg1"/>
+                </a:solidFill>
+                <a:latin typeface="Avenir Medium" panose="02000503020000020003" pitchFamily="2" charset="0"/>
+                <a:ea typeface="Bodoni Ornaments" pitchFamily="2" charset="0"/>
+              </a:rPr>
+              <a:t>and </a:t>
+            </a:r>
+            <a:r>
+              <a:rPr lang="en-US" sz="4800" dirty="0">
+                <a:solidFill>
+                  <a:schemeClr val="bg1"/>
+                </a:solidFill>
+                <a:latin typeface="Avenir Medium" panose="02000503020000020003" pitchFamily="2" charset="0"/>
+                <a:ea typeface="Bodoni Ornaments" pitchFamily="2" charset="0"/>
+              </a:rPr>
+              <a:t>rose again</a:t>
             </a:r>
           </a:p>
           <a:p>
@@ -4355,6 +4365,15 @@
             </a:r>
           </a:p>
           <a:p>
+            <a:endParaRPr lang="en-US" sz="4800" dirty="0">
+              <a:solidFill>
+                <a:schemeClr val="bg1"/>
+              </a:solidFill>
+              <a:latin typeface="Avenir Medium" panose="02000503020000020003" pitchFamily="2" charset="0"/>
+              <a:ea typeface="Bodoni Ornaments" pitchFamily="2" charset="0"/>
+            </a:endParaRPr>
+          </a:p>
+          <a:p>
             <a:r>
               <a:rPr lang="en-US" sz="4800" dirty="0">
                 <a:solidFill>
@@ -4597,6 +4616,30 @@
             </a:endParaRPr>
           </a:p>
           <a:p>
+            <a:r>
+              <a:rPr lang="en-US" sz="4800" dirty="0">
+                <a:solidFill>
+                  <a:schemeClr val="bg1"/>
+                </a:solidFill>
+                <a:latin typeface="Avenir Medium" panose="02000503020000020003" pitchFamily="2" charset="0"/>
+                <a:ea typeface="Bodoni Ornaments" pitchFamily="2" charset="0"/>
+              </a:rPr>
+              <a:t>There will be a day</a:t>
+            </a:r>
+          </a:p>
+          <a:p>
+            <a:r>
+              <a:rPr lang="en-US" sz="4800" dirty="0">
+                <a:solidFill>
+                  <a:schemeClr val="bg1"/>
+                </a:solidFill>
+                <a:latin typeface="Avenir Medium" panose="02000503020000020003" pitchFamily="2" charset="0"/>
+                <a:ea typeface="Bodoni Ornaments" pitchFamily="2" charset="0"/>
+              </a:rPr>
+              <a:t>When all will bow before Him</a:t>
+            </a:r>
+          </a:p>
+          <a:p>
             <a:endParaRPr lang="en-US" sz="4800" dirty="0">
               <a:solidFill>
                 <a:schemeClr val="bg1"/>
@@ -4604,30 +4647,6 @@
               <a:latin typeface="Avenir Medium" panose="02000503020000020003" pitchFamily="2" charset="0"/>
               <a:ea typeface="Bodoni Ornaments" pitchFamily="2" charset="0"/>
             </a:endParaRPr>
-          </a:p>
-          <a:p>
-            <a:r>
-              <a:rPr lang="en-US" sz="4800" dirty="0">
-                <a:solidFill>
-                  <a:schemeClr val="bg1"/>
-                </a:solidFill>
-                <a:latin typeface="Avenir Medium" panose="02000503020000020003" pitchFamily="2" charset="0"/>
-                <a:ea typeface="Bodoni Ornaments" pitchFamily="2" charset="0"/>
-              </a:rPr>
-              <a:t>There will be a day</a:t>
-            </a:r>
-          </a:p>
-          <a:p>
-            <a:r>
-              <a:rPr lang="en-US" sz="4800" dirty="0">
-                <a:solidFill>
-                  <a:schemeClr val="bg1"/>
-                </a:solidFill>
-                <a:latin typeface="Avenir Medium" panose="02000503020000020003" pitchFamily="2" charset="0"/>
-                <a:ea typeface="Bodoni Ornaments" pitchFamily="2" charset="0"/>
-              </a:rPr>
-              <a:t>When all will bow before Him</a:t>
-            </a:r>
           </a:p>
           <a:p>
             <a:r>
@@ -4736,6 +4755,30 @@
             </a:endParaRPr>
           </a:p>
           <a:p>
+            <a:r>
+              <a:rPr lang="en-US" sz="4800" dirty="0">
+                <a:solidFill>
+                  <a:schemeClr val="bg1"/>
+                </a:solidFill>
+                <a:latin typeface="Avenir Medium" panose="02000503020000020003" pitchFamily="2" charset="0"/>
+                <a:ea typeface="Bodoni Ornaments" pitchFamily="2" charset="0"/>
+              </a:rPr>
+              <a:t>Standing face to face</a:t>
+            </a:r>
+          </a:p>
+          <a:p>
+            <a:r>
+              <a:rPr lang="en-US" sz="4800" dirty="0">
+                <a:solidFill>
+                  <a:schemeClr val="bg1"/>
+                </a:solidFill>
+                <a:latin typeface="Avenir Medium" panose="02000503020000020003" pitchFamily="2" charset="0"/>
+                <a:ea typeface="Bodoni Ornaments" pitchFamily="2" charset="0"/>
+              </a:rPr>
+              <a:t>With He who died </a:t>
+            </a:r>
+          </a:p>
+          <a:p>
             <a:endParaRPr lang="en-US" sz="4800" dirty="0">
               <a:solidFill>
                 <a:schemeClr val="bg1"/>
@@ -4743,30 +4786,6 @@
               <a:latin typeface="Avenir Medium" panose="02000503020000020003" pitchFamily="2" charset="0"/>
               <a:ea typeface="Bodoni Ornaments" pitchFamily="2" charset="0"/>
             </a:endParaRPr>
-          </a:p>
-          <a:p>
-            <a:r>
-              <a:rPr lang="en-US" sz="4800" dirty="0">
-                <a:solidFill>
-                  <a:schemeClr val="bg1"/>
-                </a:solidFill>
-                <a:latin typeface="Avenir Medium" panose="02000503020000020003" pitchFamily="2" charset="0"/>
-                <a:ea typeface="Bodoni Ornaments" pitchFamily="2" charset="0"/>
-              </a:rPr>
-              <a:t>Standing face to face</a:t>
-            </a:r>
-          </a:p>
-          <a:p>
-            <a:r>
-              <a:rPr lang="en-US" sz="4800" dirty="0">
-                <a:solidFill>
-                  <a:schemeClr val="bg1"/>
-                </a:solidFill>
-                <a:latin typeface="Avenir Medium" panose="02000503020000020003" pitchFamily="2" charset="0"/>
-                <a:ea typeface="Bodoni Ornaments" pitchFamily="2" charset="0"/>
-              </a:rPr>
-              <a:t>With He who died </a:t>
-            </a:r>
           </a:p>
           <a:p>
             <a:r>
@@ -4899,6 +4918,15 @@
             </a:r>
           </a:p>
           <a:p>
+            <a:endParaRPr lang="en-US" sz="4800" dirty="0">
+              <a:solidFill>
+                <a:schemeClr val="bg1"/>
+              </a:solidFill>
+              <a:latin typeface="Avenir Medium" panose="02000503020000020003" pitchFamily="2" charset="0"/>
+              <a:ea typeface="Bodoni Ornaments" pitchFamily="2" charset="0"/>
+            </a:endParaRPr>
+          </a:p>
+          <a:p>
             <a:r>
               <a:rPr lang="en-US" sz="4800" dirty="0">
                 <a:solidFill>
@@ -5156,6 +5184,30 @@
             </a:endParaRPr>
           </a:p>
           <a:p>
+            <a:r>
+              <a:rPr lang="en-US" sz="4800" dirty="0">
+                <a:solidFill>
+                  <a:schemeClr val="bg1"/>
+                </a:solidFill>
+                <a:latin typeface="Avenir Medium" panose="02000503020000020003" pitchFamily="2" charset="0"/>
+                <a:ea typeface="Bodoni Ornaments" pitchFamily="2" charset="0"/>
+              </a:rPr>
+              <a:t>There will be a day</a:t>
+            </a:r>
+          </a:p>
+          <a:p>
+            <a:r>
+              <a:rPr lang="en-US" sz="4800" dirty="0">
+                <a:solidFill>
+                  <a:schemeClr val="bg1"/>
+                </a:solidFill>
+                <a:latin typeface="Avenir Medium" panose="02000503020000020003" pitchFamily="2" charset="0"/>
+                <a:ea typeface="Bodoni Ornaments" pitchFamily="2" charset="0"/>
+              </a:rPr>
+              <a:t>When all will bow before Him</a:t>
+            </a:r>
+          </a:p>
+          <a:p>
             <a:endParaRPr lang="en-US" sz="4800" dirty="0">
               <a:solidFill>
                 <a:schemeClr val="bg1"/>
@@ -5163,30 +5215,6 @@
               <a:latin typeface="Avenir Medium" panose="02000503020000020003" pitchFamily="2" charset="0"/>
               <a:ea typeface="Bodoni Ornaments" pitchFamily="2" charset="0"/>
             </a:endParaRPr>
-          </a:p>
-          <a:p>
-            <a:r>
-              <a:rPr lang="en-US" sz="4800" dirty="0">
-                <a:solidFill>
-                  <a:schemeClr val="bg1"/>
-                </a:solidFill>
-                <a:latin typeface="Avenir Medium" panose="02000503020000020003" pitchFamily="2" charset="0"/>
-                <a:ea typeface="Bodoni Ornaments" pitchFamily="2" charset="0"/>
-              </a:rPr>
-              <a:t>There will be a day</a:t>
-            </a:r>
-          </a:p>
-          <a:p>
-            <a:r>
-              <a:rPr lang="en-US" sz="4800" dirty="0">
-                <a:solidFill>
-                  <a:schemeClr val="bg1"/>
-                </a:solidFill>
-                <a:latin typeface="Avenir Medium" panose="02000503020000020003" pitchFamily="2" charset="0"/>
-                <a:ea typeface="Bodoni Ornaments" pitchFamily="2" charset="0"/>
-              </a:rPr>
-              <a:t>When all will bow before Him</a:t>
-            </a:r>
           </a:p>
           <a:p>
             <a:r>
@@ -5295,6 +5323,30 @@
             </a:endParaRPr>
           </a:p>
           <a:p>
+            <a:r>
+              <a:rPr lang="en-US" sz="4800" dirty="0">
+                <a:solidFill>
+                  <a:schemeClr val="bg1"/>
+                </a:solidFill>
+                <a:latin typeface="Avenir Medium" panose="02000503020000020003" pitchFamily="2" charset="0"/>
+                <a:ea typeface="Bodoni Ornaments" pitchFamily="2" charset="0"/>
+              </a:rPr>
+              <a:t>Standing face to face</a:t>
+            </a:r>
+          </a:p>
+          <a:p>
+            <a:r>
+              <a:rPr lang="en-US" sz="4800" dirty="0">
+                <a:solidFill>
+                  <a:schemeClr val="bg1"/>
+                </a:solidFill>
+                <a:latin typeface="Avenir Medium" panose="02000503020000020003" pitchFamily="2" charset="0"/>
+                <a:ea typeface="Bodoni Ornaments" pitchFamily="2" charset="0"/>
+              </a:rPr>
+              <a:t>With He who died </a:t>
+            </a:r>
+          </a:p>
+          <a:p>
             <a:endParaRPr lang="en-US" sz="4800" dirty="0">
               <a:solidFill>
                 <a:schemeClr val="bg1"/>
@@ -5302,30 +5354,6 @@
               <a:latin typeface="Avenir Medium" panose="02000503020000020003" pitchFamily="2" charset="0"/>
               <a:ea typeface="Bodoni Ornaments" pitchFamily="2" charset="0"/>
             </a:endParaRPr>
-          </a:p>
-          <a:p>
-            <a:r>
-              <a:rPr lang="en-US" sz="4800" dirty="0">
-                <a:solidFill>
-                  <a:schemeClr val="bg1"/>
-                </a:solidFill>
-                <a:latin typeface="Avenir Medium" panose="02000503020000020003" pitchFamily="2" charset="0"/>
-                <a:ea typeface="Bodoni Ornaments" pitchFamily="2" charset="0"/>
-              </a:rPr>
-              <a:t>Standing face to face</a:t>
-            </a:r>
-          </a:p>
-          <a:p>
-            <a:r>
-              <a:rPr lang="en-US" sz="4800" dirty="0">
-                <a:solidFill>
-                  <a:schemeClr val="bg1"/>
-                </a:solidFill>
-                <a:latin typeface="Avenir Medium" panose="02000503020000020003" pitchFamily="2" charset="0"/>
-                <a:ea typeface="Bodoni Ornaments" pitchFamily="2" charset="0"/>
-              </a:rPr>
-              <a:t>With He who died </a:t>
-            </a:r>
           </a:p>
           <a:p>
             <a:r>
